--- a/curriculum/M01/W09/L01/slides.pptx
+++ b/curriculum/M01/W09/L01/slides.pptx
@@ -4825,7 +4825,7 @@
               </a:spcAft>
             </a:pPr>
             <a:r>
-              <a:rPr sz="1400" b="1" i="0">
+              <a:rPr sz="1600" b="1" i="0">
                 <a:solidFill>
                   <a:srgbClr val="F2B705"/>
                 </a:solidFill>
@@ -4836,128 +4836,18 @@
               <a:t>•  </a:t>
             </a:r>
             <a:r>
-              <a:rPr sz="1400" b="0" i="0">
-                <a:solidFill>
-                  <a:srgbClr val="11202B"/>
-                </a:solidFill>
-                <a:latin typeface="Malgun Gothic"/>
-                <a:ea typeface="Malgun Gothic"/>
-                <a:cs typeface="Malgun Gothic"/>
-              </a:rPr>
-              <a:t>1. </a:t>
-            </a:r>
-            <a:r>
-              <a:rPr sz="1400" b="1" i="0">
-                <a:solidFill>
-                  <a:srgbClr val="11202B"/>
-                </a:solidFill>
-                <a:latin typeface="Malgun Gothic"/>
-                <a:ea typeface="Malgun Gothic"/>
-                <a:cs typeface="Malgun Gothic"/>
-              </a:rPr>
-              <a:t>신호서열의 노출.</a:t>
-            </a:r>
-            <a:r>
-              <a:rPr sz="1400" b="0" i="0">
-                <a:solidFill>
-                  <a:srgbClr val="11202B"/>
-                </a:solidFill>
-                <a:latin typeface="Malgun Gothic"/>
-                <a:ea typeface="Malgun Gothic"/>
-                <a:cs typeface="Malgun Gothic"/>
-              </a:rPr>
-              <a:t> 사슬의 N 말단이 ribosome의 exit tunnel을 나오면 15~30잔기의 소수성 구간이 드러난다. 이 구간은 대개 중앙에 leucine과 다른 소수성 잔기가 몰려 있고 N 말단 쪽에 양전하 잔기가 있다. 서열이 정해져 있지 않고 </a:t>
-            </a:r>
-            <a:r>
-              <a:rPr sz="1400" b="1" i="0">
-                <a:solidFill>
-                  <a:srgbClr val="11202B"/>
-                </a:solidFill>
-                <a:latin typeface="Malgun Gothic"/>
-                <a:ea typeface="Malgun Gothic"/>
-                <a:cs typeface="Malgun Gothic"/>
-              </a:rPr>
-              <a:t>성질만 보존되어 있다</a:t>
-            </a:r>
-            <a:r>
-              <a:rPr sz="1400" b="0" i="0">
-                <a:solidFill>
-                  <a:srgbClr val="11202B"/>
-                </a:solidFill>
-                <a:latin typeface="Malgun Gothic"/>
-                <a:ea typeface="Malgun Gothic"/>
-                <a:cs typeface="Malgun Gothic"/>
-              </a:rPr>
-              <a:t>는 점이 특징이다. 소수성 중심을 가진 어떤 서열이든 작동한다. 2. </a:t>
-            </a:r>
-            <a:r>
-              <a:rPr sz="1400" b="1" i="0">
-                <a:solidFill>
-                  <a:srgbClr val="11202B"/>
-                </a:solidFill>
-                <a:latin typeface="Malgun Gothic"/>
-                <a:ea typeface="Malgun Gothic"/>
-                <a:cs typeface="Malgun Gothic"/>
-              </a:rPr>
-              <a:t>SRP의 결합.</a:t>
-            </a:r>
-            <a:r>
-              <a:rPr sz="1400" b="0" i="0">
-                <a:solidFill>
-                  <a:srgbClr val="11202B"/>
-                </a:solidFill>
-                <a:latin typeface="Malgun Gothic"/>
-                <a:ea typeface="Malgun Gothic"/>
-                <a:cs typeface="Malgun Gothic"/>
-              </a:rPr>
-              <a:t> </a:t>
-            </a:r>
-            <a:r>
-              <a:rPr sz="1400" b="1" i="0">
-                <a:solidFill>
-                  <a:srgbClr val="11202B"/>
-                </a:solidFill>
-                <a:latin typeface="Malgun Gothic"/>
-                <a:ea typeface="Malgun Gothic"/>
-                <a:cs typeface="Malgun Gothic"/>
-              </a:rPr>
-              <a:t>Signal recognition particle(SRP)</a:t>
-            </a:r>
-            <a:r>
-              <a:rPr sz="1400" b="0" i="0">
-                <a:solidFill>
-                  <a:srgbClr val="11202B"/>
-                </a:solidFill>
-                <a:latin typeface="Malgun Gothic"/>
-                <a:ea typeface="Malgun Gothic"/>
-                <a:cs typeface="Malgun Gothic"/>
-              </a:rPr>
-              <a:t>은 RNA 한 분자와 여섯 개의 단백질로 된 복합체다. SRP가 신호서열에 결합하면 </a:t>
-            </a:r>
-            <a:r>
-              <a:rPr sz="1400" b="1" i="0">
-                <a:solidFill>
-                  <a:srgbClr val="11202B"/>
-                </a:solidFill>
-                <a:latin typeface="Malgun Gothic"/>
-                <a:ea typeface="Malgun Gothic"/>
-                <a:cs typeface="Malgun Gothic"/>
-              </a:rPr>
-              <a:t>번역이 일시적으로 느려진다.</a:t>
-            </a:r>
-            <a:r>
-              <a:rPr sz="1400" b="0" i="0">
-                <a:solidFill>
-                  <a:srgbClr val="11202B"/>
-                </a:solidFill>
-                <a:latin typeface="Malgun Gothic"/>
-                <a:ea typeface="Malgun Gothic"/>
-                <a:cs typeface="Malgun Gothic"/>
-              </a:rPr>
-              <a:t> 이 정지가 하는 일이 분명하다. 사슬이 세포질에서 다 만들어져 접혀 버리기 전에 막으로 갈 시간을 번다. 3. </a:t>
-            </a:r>
-            <a:r>
-              <a:rPr sz="1400" b="1" i="0">
+              <a:rPr sz="1600" b="0" i="0">
+                <a:solidFill>
+                  <a:srgbClr val="11202B"/>
+                </a:solidFill>
+                <a:latin typeface="Malgun Gothic"/>
+                <a:ea typeface="Malgun Gothic"/>
+                <a:cs typeface="Malgun Gothic"/>
+              </a:rPr>
+              <a:t>3. </a:t>
+            </a:r>
+            <a:r>
+              <a:rPr sz="1600" b="1" i="0">
                 <a:solidFill>
                   <a:srgbClr val="11202B"/>
                 </a:solidFill>
@@ -4968,7 +4858,7 @@
               <a:t>막으로의 도킹.</a:t>
             </a:r>
             <a:r>
-              <a:rPr sz="1400" b="0" i="0">
+              <a:rPr sz="1600" b="0" i="0">
                 <a:solidFill>
                   <a:srgbClr val="11202B"/>
                 </a:solidFill>
@@ -4979,7 +4869,7 @@
               <a:t> SRP가 소포체 막의 </a:t>
             </a:r>
             <a:r>
-              <a:rPr sz="1400" b="1" i="0">
+              <a:rPr sz="1600" b="1" i="0">
                 <a:solidFill>
                   <a:srgbClr val="11202B"/>
                 </a:solidFill>
@@ -4990,7 +4880,7 @@
               <a:t>SRP 수용체</a:t>
             </a:r>
             <a:r>
-              <a:rPr sz="1400" b="0" i="0">
+              <a:rPr sz="1600" b="0" i="0">
                 <a:solidFill>
                   <a:srgbClr val="11202B"/>
                 </a:solidFill>
@@ -5001,7 +4891,7 @@
               <a:t>와 결합한다. 두 분자 모두 GTP 결합 단백질이며, GTP가 결합한 상태에서 서로를 인식하고 GTP를 가수분해하면 떨어진다. 즉 </a:t>
             </a:r>
             <a:r>
-              <a:rPr sz="1400" b="1" i="0">
+              <a:rPr sz="1600" b="1" i="0">
                 <a:solidFill>
                   <a:srgbClr val="11202B"/>
                 </a:solidFill>
@@ -5011,19 +4901,37 @@
               </a:rPr>
               <a:t>SRP의 작용 주기도 GTP의 결합과 가수분해로 조절된다.</a:t>
             </a:r>
-            <a:r>
-              <a:rPr sz="1400" b="0" i="0">
-                <a:solidFill>
-                  <a:srgbClr val="11202B"/>
-                </a:solidFill>
-                <a:latin typeface="Malgun Gothic"/>
-                <a:ea typeface="Malgun Gothic"/>
-                <a:cs typeface="Malgun Gothic"/>
-              </a:rPr>
-              <a:t> 4. </a:t>
-            </a:r>
-            <a:r>
-              <a:rPr sz="1400" b="1" i="0">
+          </a:p>
+          <a:p>
+            <a:pPr>
+              <a:spcAft>
+                <a:spcPts val="900"/>
+              </a:spcAft>
+            </a:pPr>
+            <a:r>
+              <a:rPr sz="1600" b="1" i="0">
+                <a:solidFill>
+                  <a:srgbClr val="F2B705"/>
+                </a:solidFill>
+                <a:latin typeface="Malgun Gothic"/>
+                <a:ea typeface="Malgun Gothic"/>
+                <a:cs typeface="Malgun Gothic"/>
+              </a:rPr>
+              <a:t>•  </a:t>
+            </a:r>
+            <a:r>
+              <a:rPr sz="1600" b="0" i="0">
+                <a:solidFill>
+                  <a:srgbClr val="11202B"/>
+                </a:solidFill>
+                <a:latin typeface="Malgun Gothic"/>
+                <a:ea typeface="Malgun Gothic"/>
+                <a:cs typeface="Malgun Gothic"/>
+              </a:rPr>
+              <a:t>4. </a:t>
+            </a:r>
+            <a:r>
+              <a:rPr sz="1600" b="1" i="0">
                 <a:solidFill>
                   <a:srgbClr val="11202B"/>
                 </a:solidFill>
@@ -5034,7 +4942,7 @@
               <a:t>Translocon으로의 인계.</a:t>
             </a:r>
             <a:r>
-              <a:rPr sz="1400" b="0" i="0">
+              <a:rPr sz="1600" b="0" i="0">
                 <a:solidFill>
                   <a:srgbClr val="11202B"/>
                 </a:solidFill>
@@ -5045,7 +4953,7 @@
               <a:t> Ribosome이 막의 통로 복합체인 </a:t>
             </a:r>
             <a:r>
-              <a:rPr sz="1400" b="1" i="0">
+              <a:rPr sz="1600" b="1" i="0">
                 <a:solidFill>
                   <a:srgbClr val="11202B"/>
                 </a:solidFill>
@@ -5056,18 +4964,47 @@
               <a:t>translocon(Sec61 복합체)</a:t>
             </a:r>
             <a:r>
-              <a:rPr sz="1400" b="0" i="0">
-                <a:solidFill>
-                  <a:srgbClr val="11202B"/>
-                </a:solidFill>
-                <a:latin typeface="Malgun Gothic"/>
-                <a:ea typeface="Malgun Gothic"/>
-                <a:cs typeface="Malgun Gothic"/>
-              </a:rPr>
-              <a:t>에 얹히고, SRP는 떨어져 다음 사슬을 받으러 간다. 번역이 다시 빨라진다. 5. </a:t>
-            </a:r>
-            <a:r>
-              <a:rPr sz="1400" b="1" i="0">
+              <a:rPr sz="1600" b="0" i="0">
+                <a:solidFill>
+                  <a:srgbClr val="11202B"/>
+                </a:solidFill>
+                <a:latin typeface="Malgun Gothic"/>
+                <a:ea typeface="Malgun Gothic"/>
+                <a:cs typeface="Malgun Gothic"/>
+              </a:rPr>
+              <a:t>에 얹히고, SRP는 떨어져 다음 사슬을 받으러 간다. 번역이 다시 빨라진다.</a:t>
+            </a:r>
+          </a:p>
+          <a:p>
+            <a:pPr>
+              <a:spcAft>
+                <a:spcPts val="900"/>
+              </a:spcAft>
+            </a:pPr>
+            <a:r>
+              <a:rPr sz="1600" b="1" i="0">
+                <a:solidFill>
+                  <a:srgbClr val="F2B705"/>
+                </a:solidFill>
+                <a:latin typeface="Malgun Gothic"/>
+                <a:ea typeface="Malgun Gothic"/>
+                <a:cs typeface="Malgun Gothic"/>
+              </a:rPr>
+              <a:t>•  </a:t>
+            </a:r>
+            <a:r>
+              <a:rPr sz="1600" b="0" i="0">
+                <a:solidFill>
+                  <a:srgbClr val="11202B"/>
+                </a:solidFill>
+                <a:latin typeface="Malgun Gothic"/>
+                <a:ea typeface="Malgun Gothic"/>
+                <a:cs typeface="Malgun Gothic"/>
+              </a:rPr>
+              <a:t>5. </a:t>
+            </a:r>
+            <a:r>
+              <a:rPr sz="1600" b="1" i="0">
                 <a:solidFill>
                   <a:srgbClr val="11202B"/>
                 </a:solidFill>
@@ -5078,7 +5015,7 @@
               <a:t>통과.</a:t>
             </a:r>
             <a:r>
-              <a:rPr sz="1400" b="0" i="0">
+              <a:rPr sz="1600" b="0" i="0">
                 <a:solidFill>
                   <a:srgbClr val="11202B"/>
                 </a:solidFill>
@@ -5089,7 +5026,7 @@
               <a:t> 신호서열이 translocon의 통로를 열고, 사슬이 통로를 지나 내강으로 들어간다. 통로는 평소에 작은 마개로 닫혀 있고 신호서열이 그 마개를 밀어낸다. 통과의 추진력은 번역 자체, 즉 </a:t>
             </a:r>
             <a:r>
-              <a:rPr sz="1400" b="1" i="0">
+              <a:rPr sz="1600" b="1" i="0">
                 <a:solidFill>
                   <a:srgbClr val="11202B"/>
                 </a:solidFill>
@@ -5100,18 +5037,47 @@
               <a:t>ribosome이 사슬을 밀어내는 힘</a:t>
             </a:r>
             <a:r>
-              <a:rPr sz="1400" b="0" i="0">
-                <a:solidFill>
-                  <a:srgbClr val="11202B"/>
-                </a:solidFill>
-                <a:latin typeface="Malgun Gothic"/>
-                <a:ea typeface="Malgun Gothic"/>
-                <a:cs typeface="Malgun Gothic"/>
-              </a:rPr>
-              <a:t>이다. 세포질 쪽에서 밀고, 내강 쪽에서는 chaperone BiP가 들어온 사슬을 붙잡아 되돌아가지 못하게 한다. 6. </a:t>
-            </a:r>
-            <a:r>
-              <a:rPr sz="1400" b="1" i="0">
+              <a:rPr sz="1600" b="0" i="0">
+                <a:solidFill>
+                  <a:srgbClr val="11202B"/>
+                </a:solidFill>
+                <a:latin typeface="Malgun Gothic"/>
+                <a:ea typeface="Malgun Gothic"/>
+                <a:cs typeface="Malgun Gothic"/>
+              </a:rPr>
+              <a:t>이다. 세포질 쪽에서 밀고, 내강 쪽에서는 chaperone BiP가 들어온 사슬을 붙잡아 되돌아가지 못하게 한다.</a:t>
+            </a:r>
+          </a:p>
+          <a:p>
+            <a:pPr>
+              <a:spcAft>
+                <a:spcPts val="900"/>
+              </a:spcAft>
+            </a:pPr>
+            <a:r>
+              <a:rPr sz="1600" b="1" i="0">
+                <a:solidFill>
+                  <a:srgbClr val="F2B705"/>
+                </a:solidFill>
+                <a:latin typeface="Malgun Gothic"/>
+                <a:ea typeface="Malgun Gothic"/>
+                <a:cs typeface="Malgun Gothic"/>
+              </a:rPr>
+              <a:t>•  </a:t>
+            </a:r>
+            <a:r>
+              <a:rPr sz="1600" b="0" i="0">
+                <a:solidFill>
+                  <a:srgbClr val="11202B"/>
+                </a:solidFill>
+                <a:latin typeface="Malgun Gothic"/>
+                <a:ea typeface="Malgun Gothic"/>
+                <a:cs typeface="Malgun Gothic"/>
+              </a:rPr>
+              <a:t>6. </a:t>
+            </a:r>
+            <a:r>
+              <a:rPr sz="1600" b="1" i="0">
                 <a:solidFill>
                   <a:srgbClr val="11202B"/>
                 </a:solidFill>
@@ -5122,7 +5088,7 @@
               <a:t>신호의 제거.</a:t>
             </a:r>
             <a:r>
-              <a:rPr sz="1400" b="0" i="0">
+              <a:rPr sz="1600" b="0" i="0">
                 <a:solidFill>
                   <a:srgbClr val="11202B"/>
                 </a:solidFill>
@@ -5133,7 +5099,7 @@
               <a:t> 막의 내강 쪽에 붙은 </a:t>
             </a:r>
             <a:r>
-              <a:rPr sz="1400" b="1" i="0">
+              <a:rPr sz="1600" b="1" i="0">
                 <a:solidFill>
                   <a:srgbClr val="11202B"/>
                 </a:solidFill>
@@ -5144,7 +5110,7 @@
               <a:t>signal peptidase</a:t>
             </a:r>
             <a:r>
-              <a:rPr sz="1400" b="0" i="0">
+              <a:rPr sz="1600" b="0" i="0">
                 <a:solidFill>
                   <a:srgbClr val="11202B"/>
                 </a:solidFill>
@@ -14106,95 +14072,7 @@
                 <a:ea typeface="Malgun Gothic"/>
                 <a:cs typeface="Malgun Gothic"/>
               </a:rPr>
-              <a:t>1. 리간드가 세포막의 수용체에 결합한다. 2. 수용체의 세포질 쪽 꼬리에 있는 신호(대개 tyrosine이나 이중 leucine을 포함한 짧은 서열)가 어댑터 단백질 AP2에 인식되고, AP2가 clathrin을 모아 </a:t>
-            </a:r>
-            <a:r>
-              <a:rPr sz="1400" b="1" i="0">
-                <a:solidFill>
-                  <a:srgbClr val="11202B"/>
-                </a:solidFill>
-                <a:latin typeface="Malgun Gothic"/>
-                <a:ea typeface="Malgun Gothic"/>
-                <a:cs typeface="Malgun Gothic"/>
-              </a:rPr>
-              <a:t>clathrin 피막 함몰부(coated pit)</a:t>
-            </a:r>
-            <a:r>
-              <a:rPr sz="1400" b="0" i="0">
-                <a:solidFill>
-                  <a:srgbClr val="11202B"/>
-                </a:solidFill>
-                <a:latin typeface="Malgun Gothic"/>
-                <a:ea typeface="Malgun Gothic"/>
-                <a:cs typeface="Malgun Gothic"/>
-              </a:rPr>
-              <a:t>를 만든다. 3. 함몰부가 깊어지고 목이 좁아지면 </a:t>
-            </a:r>
-            <a:r>
-              <a:rPr sz="1400" b="1" i="0">
-                <a:solidFill>
-                  <a:srgbClr val="11202B"/>
-                </a:solidFill>
-                <a:latin typeface="Malgun Gothic"/>
-                <a:ea typeface="Malgun Gothic"/>
-                <a:cs typeface="Malgun Gothic"/>
-              </a:rPr>
-              <a:t>dynamin</a:t>
-            </a:r>
-            <a:r>
-              <a:rPr sz="1400" b="0" i="0">
-                <a:solidFill>
-                  <a:srgbClr val="11202B"/>
-                </a:solidFill>
-                <a:latin typeface="Malgun Gothic"/>
-                <a:ea typeface="Malgun Gothic"/>
-                <a:cs typeface="Malgun Gothic"/>
-              </a:rPr>
-              <a:t>이 목을 고리처럼 둘러싸고 GTP를 가수분해하며 막을 끊어 소포를 떼어 낸다. 4. 피막이 해체되고 소포가 </a:t>
-            </a:r>
-            <a:r>
-              <a:rPr sz="1400" b="1" i="0">
-                <a:solidFill>
-                  <a:srgbClr val="11202B"/>
-                </a:solidFill>
-                <a:latin typeface="Malgun Gothic"/>
-                <a:ea typeface="Malgun Gothic"/>
-                <a:cs typeface="Malgun Gothic"/>
-              </a:rPr>
-              <a:t>early endosome</a:t>
-            </a:r>
-            <a:r>
-              <a:rPr sz="1400" b="0" i="0">
-                <a:solidFill>
-                  <a:srgbClr val="11202B"/>
-                </a:solidFill>
-                <a:latin typeface="Malgun Gothic"/>
-                <a:ea typeface="Malgun Gothic"/>
-                <a:cs typeface="Malgun Gothic"/>
-              </a:rPr>
-              <a:t>과 융합한다. 5. Endosome의 막에 있는 proton pump가 내부를 산성화한다(early endosome pH 약 6.0, late endosome 5.5 이하). 6. </a:t>
-            </a:r>
-            <a:r>
-              <a:rPr sz="1400" b="1" i="0">
-                <a:solidFill>
-                  <a:srgbClr val="11202B"/>
-                </a:solidFill>
-                <a:latin typeface="Malgun Gothic"/>
-                <a:ea typeface="Malgun Gothic"/>
-                <a:cs typeface="Malgun Gothic"/>
-              </a:rPr>
-              <a:t>산성 pH에서 리간드가 수용체에서 떨어진다.</a:t>
-            </a:r>
-            <a:r>
-              <a:rPr sz="1400" b="0" i="0">
-                <a:solidFill>
-                  <a:srgbClr val="11202B"/>
-                </a:solidFill>
-                <a:latin typeface="Malgun Gothic"/>
-                <a:ea typeface="Malgun Gothic"/>
-                <a:cs typeface="Malgun Gothic"/>
-              </a:rPr>
-              <a:t> 수용체는 재순환 소포에 실려 세포막으로 되돌아가고, 리간드는 late endosome을 거쳐 lysosome으로 가서 분해된다.</a:t>
+              <a:t>1. 리간드가 세포막의 수용체에 결합한다.</a:t>
             </a:r>
           </a:p>
           <a:p>
@@ -14223,7 +14101,7 @@
                 <a:ea typeface="Malgun Gothic"/>
                 <a:cs typeface="Malgun Gothic"/>
               </a:rPr>
-              <a:t>5번과 6번이 이 경로의 핵심이다. </a:t>
+              <a:t>2. 수용체의 세포질 쪽 꼬리에 있는 신호(대개 tyrosine이나 이중 leucine을 포함한 짧은 서열)가 어댑터 단백질 AP2에 인식되고, AP2가 clathrin을 모아 </a:t>
             </a:r>
             <a:r>
               <a:rPr sz="1400" b="1" i="0">
@@ -14234,7 +14112,7 @@
                 <a:ea typeface="Malgun Gothic"/>
                 <a:cs typeface="Malgun Gothic"/>
               </a:rPr>
-              <a:t>수용체를 재사용하려면 리간드를 어딘가에서 놓아야 하고, 그 "어딘가"를 pH로 지정한다.</a:t>
+              <a:t>clathrin 피막 함몰부(coated pit)</a:t>
             </a:r>
             <a:r>
               <a:rPr sz="1400" b="0" i="0">
@@ -14245,7 +14123,189 @@
                 <a:ea typeface="Malgun Gothic"/>
                 <a:cs typeface="Malgun Gothic"/>
               </a:rPr>
-              <a:t> LDL 수용체는 한 번 만들어져 수백 번 왕복한다. 앞 절의 KDEL 수용체와 완전히 같은 전략이다.</a:t>
+              <a:t>를 만든다.</a:t>
+            </a:r>
+          </a:p>
+          <a:p>
+            <a:pPr>
+              <a:spcAft>
+                <a:spcPts val="900"/>
+              </a:spcAft>
+            </a:pPr>
+            <a:r>
+              <a:rPr sz="1400" b="1" i="0">
+                <a:solidFill>
+                  <a:srgbClr val="F2B705"/>
+                </a:solidFill>
+                <a:latin typeface="Malgun Gothic"/>
+                <a:ea typeface="Malgun Gothic"/>
+                <a:cs typeface="Malgun Gothic"/>
+              </a:rPr>
+              <a:t>•  </a:t>
+            </a:r>
+            <a:r>
+              <a:rPr sz="1400" b="0" i="0">
+                <a:solidFill>
+                  <a:srgbClr val="11202B"/>
+                </a:solidFill>
+                <a:latin typeface="Malgun Gothic"/>
+                <a:ea typeface="Malgun Gothic"/>
+                <a:cs typeface="Malgun Gothic"/>
+              </a:rPr>
+              <a:t>3. 함몰부가 깊어지고 목이 좁아지면 </a:t>
+            </a:r>
+            <a:r>
+              <a:rPr sz="1400" b="1" i="0">
+                <a:solidFill>
+                  <a:srgbClr val="11202B"/>
+                </a:solidFill>
+                <a:latin typeface="Malgun Gothic"/>
+                <a:ea typeface="Malgun Gothic"/>
+                <a:cs typeface="Malgun Gothic"/>
+              </a:rPr>
+              <a:t>dynamin</a:t>
+            </a:r>
+            <a:r>
+              <a:rPr sz="1400" b="0" i="0">
+                <a:solidFill>
+                  <a:srgbClr val="11202B"/>
+                </a:solidFill>
+                <a:latin typeface="Malgun Gothic"/>
+                <a:ea typeface="Malgun Gothic"/>
+                <a:cs typeface="Malgun Gothic"/>
+              </a:rPr>
+              <a:t>이 목을 고리처럼 둘러싸고 GTP를 가수분해하며 막을 끊어 소포를 떼어 낸다.</a:t>
+            </a:r>
+          </a:p>
+          <a:p>
+            <a:pPr>
+              <a:spcAft>
+                <a:spcPts val="900"/>
+              </a:spcAft>
+            </a:pPr>
+            <a:r>
+              <a:rPr sz="1400" b="1" i="0">
+                <a:solidFill>
+                  <a:srgbClr val="F2B705"/>
+                </a:solidFill>
+                <a:latin typeface="Malgun Gothic"/>
+                <a:ea typeface="Malgun Gothic"/>
+                <a:cs typeface="Malgun Gothic"/>
+              </a:rPr>
+              <a:t>•  </a:t>
+            </a:r>
+            <a:r>
+              <a:rPr sz="1400" b="0" i="0">
+                <a:solidFill>
+                  <a:srgbClr val="11202B"/>
+                </a:solidFill>
+                <a:latin typeface="Malgun Gothic"/>
+                <a:ea typeface="Malgun Gothic"/>
+                <a:cs typeface="Malgun Gothic"/>
+              </a:rPr>
+              <a:t>4. 피막이 해체되고 소포가 </a:t>
+            </a:r>
+            <a:r>
+              <a:rPr sz="1400" b="1" i="0">
+                <a:solidFill>
+                  <a:srgbClr val="11202B"/>
+                </a:solidFill>
+                <a:latin typeface="Malgun Gothic"/>
+                <a:ea typeface="Malgun Gothic"/>
+                <a:cs typeface="Malgun Gothic"/>
+              </a:rPr>
+              <a:t>early endosome</a:t>
+            </a:r>
+            <a:r>
+              <a:rPr sz="1400" b="0" i="0">
+                <a:solidFill>
+                  <a:srgbClr val="11202B"/>
+                </a:solidFill>
+                <a:latin typeface="Malgun Gothic"/>
+                <a:ea typeface="Malgun Gothic"/>
+                <a:cs typeface="Malgun Gothic"/>
+              </a:rPr>
+              <a:t>과 융합한다.</a:t>
+            </a:r>
+          </a:p>
+          <a:p>
+            <a:pPr>
+              <a:spcAft>
+                <a:spcPts val="900"/>
+              </a:spcAft>
+            </a:pPr>
+            <a:r>
+              <a:rPr sz="1400" b="1" i="0">
+                <a:solidFill>
+                  <a:srgbClr val="F2B705"/>
+                </a:solidFill>
+                <a:latin typeface="Malgun Gothic"/>
+                <a:ea typeface="Malgun Gothic"/>
+                <a:cs typeface="Malgun Gothic"/>
+              </a:rPr>
+              <a:t>•  </a:t>
+            </a:r>
+            <a:r>
+              <a:rPr sz="1400" b="0" i="0">
+                <a:solidFill>
+                  <a:srgbClr val="11202B"/>
+                </a:solidFill>
+                <a:latin typeface="Malgun Gothic"/>
+                <a:ea typeface="Malgun Gothic"/>
+                <a:cs typeface="Malgun Gothic"/>
+              </a:rPr>
+              <a:t>5. Endosome의 막에 있는 proton pump가 내부를 산성화한다(early endosome pH 약 6.0, late endosome 5.5 이하).</a:t>
+            </a:r>
+          </a:p>
+          <a:p>
+            <a:pPr>
+              <a:spcAft>
+                <a:spcPts val="900"/>
+              </a:spcAft>
+            </a:pPr>
+            <a:r>
+              <a:rPr sz="1400" b="1" i="0">
+                <a:solidFill>
+                  <a:srgbClr val="F2B705"/>
+                </a:solidFill>
+                <a:latin typeface="Malgun Gothic"/>
+                <a:ea typeface="Malgun Gothic"/>
+                <a:cs typeface="Malgun Gothic"/>
+              </a:rPr>
+              <a:t>•  </a:t>
+            </a:r>
+            <a:r>
+              <a:rPr sz="1400" b="0" i="0">
+                <a:solidFill>
+                  <a:srgbClr val="11202B"/>
+                </a:solidFill>
+                <a:latin typeface="Malgun Gothic"/>
+                <a:ea typeface="Malgun Gothic"/>
+                <a:cs typeface="Malgun Gothic"/>
+              </a:rPr>
+              <a:t>6. </a:t>
+            </a:r>
+            <a:r>
+              <a:rPr sz="1400" b="1" i="0">
+                <a:solidFill>
+                  <a:srgbClr val="11202B"/>
+                </a:solidFill>
+                <a:latin typeface="Malgun Gothic"/>
+                <a:ea typeface="Malgun Gothic"/>
+                <a:cs typeface="Malgun Gothic"/>
+              </a:rPr>
+              <a:t>산성 pH에서 리간드가 수용체에서 떨어진다.</a:t>
+            </a:r>
+            <a:r>
+              <a:rPr sz="1400" b="0" i="0">
+                <a:solidFill>
+                  <a:srgbClr val="11202B"/>
+                </a:solidFill>
+                <a:latin typeface="Malgun Gothic"/>
+                <a:ea typeface="Malgun Gothic"/>
+                <a:cs typeface="Malgun Gothic"/>
+              </a:rPr>
+              <a:t> 수용체는 재순환 소포에 실려 세포막으로 되돌아가고, 리간드는 late endosome을 거쳐 lysosome으로 가서 분해된다.</a:t>
             </a:r>
           </a:p>
         </p:txBody>
@@ -14905,7 +14965,7 @@
               </a:spcAft>
             </a:pPr>
             <a:r>
-              <a:rPr sz="2000" b="1" i="0">
+              <a:rPr sz="1800" b="1" i="0">
                 <a:solidFill>
                   <a:srgbClr val="F2B705"/>
                 </a:solidFill>
@@ -14916,7 +14976,58 @@
               <a:t>•  </a:t>
             </a:r>
             <a:r>
-              <a:rPr sz="2000" b="0" i="0">
+              <a:rPr sz="1800" b="0" i="0">
+                <a:solidFill>
+                  <a:srgbClr val="11202B"/>
+                </a:solidFill>
+                <a:latin typeface="Malgun Gothic"/>
+                <a:ea typeface="Malgun Gothic"/>
+                <a:cs typeface="Malgun Gothic"/>
+              </a:rPr>
+              <a:t>5번과 6번이 이 경로의 핵심이다. </a:t>
+            </a:r>
+            <a:r>
+              <a:rPr sz="1800" b="1" i="0">
+                <a:solidFill>
+                  <a:srgbClr val="11202B"/>
+                </a:solidFill>
+                <a:latin typeface="Malgun Gothic"/>
+                <a:ea typeface="Malgun Gothic"/>
+                <a:cs typeface="Malgun Gothic"/>
+              </a:rPr>
+              <a:t>수용체를 재사용하려면 리간드를 어딘가에서 놓아야 하고, 그 "어딘가"를 pH로 지정한다.</a:t>
+            </a:r>
+            <a:r>
+              <a:rPr sz="1800" b="0" i="0">
+                <a:solidFill>
+                  <a:srgbClr val="11202B"/>
+                </a:solidFill>
+                <a:latin typeface="Malgun Gothic"/>
+                <a:ea typeface="Malgun Gothic"/>
+                <a:cs typeface="Malgun Gothic"/>
+              </a:rPr>
+              <a:t> LDL 수용체는 한 번 만들어져 수백 번 왕복한다. 앞 절의 KDEL 수용체와 완전히 같은 전략이다.</a:t>
+            </a:r>
+          </a:p>
+          <a:p>
+            <a:pPr>
+              <a:spcAft>
+                <a:spcPts val="900"/>
+              </a:spcAft>
+            </a:pPr>
+            <a:r>
+              <a:rPr sz="1800" b="1" i="0">
+                <a:solidFill>
+                  <a:srgbClr val="F2B705"/>
+                </a:solidFill>
+                <a:latin typeface="Malgun Gothic"/>
+                <a:ea typeface="Malgun Gothic"/>
+                <a:cs typeface="Malgun Gothic"/>
+              </a:rPr>
+              <a:t>•  </a:t>
+            </a:r>
+            <a:r>
+              <a:rPr sz="1800" b="0" i="0">
                 <a:solidFill>
                   <a:srgbClr val="11202B"/>
                 </a:solidFill>
@@ -14927,7 +15038,7 @@
               <a:t>재순환의 갈림길도 정해져 있다. Early endosome에서 수용체가 세포막으로 되돌아가거나(재순환), 반대쪽 막으로 운반되거나(상피세포의 transcytosis), lysosome으로 보내진다. 세 갈래를 정하는 것은 수용체 꼬리의 신호와 </a:t>
             </a:r>
             <a:r>
-              <a:rPr sz="2000" b="1" i="0">
+              <a:rPr sz="1800" b="1" i="0">
                 <a:solidFill>
                   <a:srgbClr val="11202B"/>
                 </a:solidFill>
@@ -14938,7 +15049,7 @@
               <a:t>ubiquitin 표지</a:t>
             </a:r>
             <a:r>
-              <a:rPr sz="2000" b="0" i="0">
+              <a:rPr sz="1800" b="0" i="0">
                 <a:solidFill>
                   <a:srgbClr val="11202B"/>
                 </a:solidFill>
@@ -27635,7 +27746,7 @@
               </a:spcAft>
             </a:pPr>
             <a:r>
-              <a:rPr sz="1600" b="1" i="0">
+              <a:rPr sz="1400" b="1" i="0">
                 <a:solidFill>
                   <a:srgbClr val="F2B705"/>
                 </a:solidFill>
@@ -27646,7 +27757,7 @@
               <a:t>•  </a:t>
             </a:r>
             <a:r>
-              <a:rPr sz="1600" b="0" i="0">
+              <a:rPr sz="1400" b="0" i="0">
                 <a:solidFill>
                   <a:srgbClr val="11202B"/>
                 </a:solidFill>
@@ -27657,7 +27768,7 @@
               <a:t>1970년대에 Günter Blobel이 제안한 </a:t>
             </a:r>
             <a:r>
-              <a:rPr sz="1600" b="1" i="0">
+              <a:rPr sz="1400" b="1" i="0">
                 <a:solidFill>
                   <a:srgbClr val="11202B"/>
                 </a:solidFill>
@@ -27668,7 +27779,7 @@
               <a:t>신호 가설(signal hypothesis)</a:t>
             </a:r>
             <a:r>
-              <a:rPr sz="1600" b="0" i="0">
+              <a:rPr sz="1400" b="0" i="0">
                 <a:solidFill>
                   <a:srgbClr val="11202B"/>
                 </a:solidFill>
@@ -27686,7 +27797,7 @@
               </a:spcAft>
             </a:pPr>
             <a:r>
-              <a:rPr sz="1600" b="1" i="0">
+              <a:rPr sz="1400" b="1" i="0">
                 <a:solidFill>
                   <a:srgbClr val="F2B705"/>
                 </a:solidFill>
@@ -27697,7 +27808,7 @@
               <a:t>•  </a:t>
             </a:r>
             <a:r>
-              <a:rPr sz="1600" b="0" i="0">
+              <a:rPr sz="1400" b="0" i="0">
                 <a:solidFill>
                   <a:srgbClr val="11202B"/>
                 </a:solidFill>
@@ -27708,7 +27819,7 @@
               <a:t>검증에 쓰인 실험의 논리가 중요하다. 시험관에서 분비 단백질의 mRNA를 번역하면 세포에서 얻은 성숙 단백질보다 </a:t>
             </a:r>
             <a:r>
-              <a:rPr sz="1600" b="1" i="0">
+              <a:rPr sz="1400" b="1" i="0">
                 <a:solidFill>
                   <a:srgbClr val="11202B"/>
                 </a:solidFill>
@@ -27719,7 +27830,7 @@
               <a:t>약 20잔기 긴 산물</a:t>
             </a:r>
             <a:r>
-              <a:rPr sz="1600" b="0" i="0">
+              <a:rPr sz="1400" b="0" i="0">
                 <a:solidFill>
                   <a:srgbClr val="11202B"/>
                 </a:solidFill>
@@ -27730,7 +27841,7 @@
               <a:t>이 나온다. 같은 반응에 소포체에서 분리한 막 소포(microsome)를 넣으면 산물의 길이가 성숙 단백질과 같아지고, 그 산물은 </a:t>
             </a:r>
             <a:r>
-              <a:rPr sz="1600" b="1" i="0">
+              <a:rPr sz="1400" b="1" i="0">
                 <a:solidFill>
                   <a:srgbClr val="11202B"/>
                 </a:solidFill>
@@ -27741,7 +27852,7 @@
               <a:t>protease를 넣어도 분해되지 않는다.</a:t>
             </a:r>
             <a:r>
-              <a:rPr sz="1600" b="0" i="0">
+              <a:rPr sz="1400" b="0" i="0">
                 <a:solidFill>
                   <a:srgbClr val="11202B"/>
                 </a:solidFill>
@@ -27752,7 +27863,7 @@
               <a:t> 소포 안으로 들어가 보호되었다는 뜻이다. 결정적인 것은 순서다. 번역이 끝난 뒤에 microsome을 넣으면 산물은 짧아지지도 않고 보호되지도 않는다. </a:t>
             </a:r>
             <a:r>
-              <a:rPr sz="1600" b="1" i="0">
+              <a:rPr sz="1400" b="1" i="0">
                 <a:solidFill>
                   <a:srgbClr val="11202B"/>
                 </a:solidFill>
@@ -27770,7 +27881,7 @@
               </a:spcAft>
             </a:pPr>
             <a:r>
-              <a:rPr sz="1600" b="1" i="0">
+              <a:rPr sz="1400" b="1" i="0">
                 <a:solidFill>
                   <a:srgbClr val="F2B705"/>
                 </a:solidFill>
@@ -27781,7 +27892,7 @@
               <a:t>•  </a:t>
             </a:r>
             <a:r>
-              <a:rPr sz="1600" b="0" i="0">
+              <a:rPr sz="1400" b="0" i="0">
                 <a:solidFill>
                   <a:srgbClr val="11202B"/>
                 </a:solidFill>
@@ -27790,6 +27901,174 @@
                 <a:cs typeface="Malgun Gothic"/>
               </a:rPr>
               <a:t>수송의 단계는 다음과 같다.</a:t>
+            </a:r>
+          </a:p>
+          <a:p>
+            <a:pPr>
+              <a:spcAft>
+                <a:spcPts val="900"/>
+              </a:spcAft>
+            </a:pPr>
+            <a:r>
+              <a:rPr sz="1400" b="1" i="0">
+                <a:solidFill>
+                  <a:srgbClr val="F2B705"/>
+                </a:solidFill>
+                <a:latin typeface="Malgun Gothic"/>
+                <a:ea typeface="Malgun Gothic"/>
+                <a:cs typeface="Malgun Gothic"/>
+              </a:rPr>
+              <a:t>•  </a:t>
+            </a:r>
+            <a:r>
+              <a:rPr sz="1400" b="0" i="0">
+                <a:solidFill>
+                  <a:srgbClr val="11202B"/>
+                </a:solidFill>
+                <a:latin typeface="Malgun Gothic"/>
+                <a:ea typeface="Malgun Gothic"/>
+                <a:cs typeface="Malgun Gothic"/>
+              </a:rPr>
+              <a:t>1. </a:t>
+            </a:r>
+            <a:r>
+              <a:rPr sz="1400" b="1" i="0">
+                <a:solidFill>
+                  <a:srgbClr val="11202B"/>
+                </a:solidFill>
+                <a:latin typeface="Malgun Gothic"/>
+                <a:ea typeface="Malgun Gothic"/>
+                <a:cs typeface="Malgun Gothic"/>
+              </a:rPr>
+              <a:t>신호서열의 노출.</a:t>
+            </a:r>
+            <a:r>
+              <a:rPr sz="1400" b="0" i="0">
+                <a:solidFill>
+                  <a:srgbClr val="11202B"/>
+                </a:solidFill>
+                <a:latin typeface="Malgun Gothic"/>
+                <a:ea typeface="Malgun Gothic"/>
+                <a:cs typeface="Malgun Gothic"/>
+              </a:rPr>
+              <a:t> 사슬의 N 말단이 ribosome의 exit tunnel을 나오면 15~30잔기의 소수성 구간이 드러난다. 이 구간은 대개 중앙에 leucine과 다른 소수성 잔기가 몰려 있고 N 말단 쪽에 양전하 잔기가 있다. 서열이 정해져 있지 않고 </a:t>
+            </a:r>
+            <a:r>
+              <a:rPr sz="1400" b="1" i="0">
+                <a:solidFill>
+                  <a:srgbClr val="11202B"/>
+                </a:solidFill>
+                <a:latin typeface="Malgun Gothic"/>
+                <a:ea typeface="Malgun Gothic"/>
+                <a:cs typeface="Malgun Gothic"/>
+              </a:rPr>
+              <a:t>성질만 보존되어 있다</a:t>
+            </a:r>
+            <a:r>
+              <a:rPr sz="1400" b="0" i="0">
+                <a:solidFill>
+                  <a:srgbClr val="11202B"/>
+                </a:solidFill>
+                <a:latin typeface="Malgun Gothic"/>
+                <a:ea typeface="Malgun Gothic"/>
+                <a:cs typeface="Malgun Gothic"/>
+              </a:rPr>
+              <a:t>는 점이 특징이다. 소수성 중심을 가진 어떤 서열이든 작동한다.</a:t>
+            </a:r>
+          </a:p>
+          <a:p>
+            <a:pPr>
+              <a:spcAft>
+                <a:spcPts val="900"/>
+              </a:spcAft>
+            </a:pPr>
+            <a:r>
+              <a:rPr sz="1400" b="1" i="0">
+                <a:solidFill>
+                  <a:srgbClr val="F2B705"/>
+                </a:solidFill>
+                <a:latin typeface="Malgun Gothic"/>
+                <a:ea typeface="Malgun Gothic"/>
+                <a:cs typeface="Malgun Gothic"/>
+              </a:rPr>
+              <a:t>•  </a:t>
+            </a:r>
+            <a:r>
+              <a:rPr sz="1400" b="0" i="0">
+                <a:solidFill>
+                  <a:srgbClr val="11202B"/>
+                </a:solidFill>
+                <a:latin typeface="Malgun Gothic"/>
+                <a:ea typeface="Malgun Gothic"/>
+                <a:cs typeface="Malgun Gothic"/>
+              </a:rPr>
+              <a:t>2. </a:t>
+            </a:r>
+            <a:r>
+              <a:rPr sz="1400" b="1" i="0">
+                <a:solidFill>
+                  <a:srgbClr val="11202B"/>
+                </a:solidFill>
+                <a:latin typeface="Malgun Gothic"/>
+                <a:ea typeface="Malgun Gothic"/>
+                <a:cs typeface="Malgun Gothic"/>
+              </a:rPr>
+              <a:t>SRP의 결합.</a:t>
+            </a:r>
+            <a:r>
+              <a:rPr sz="1400" b="0" i="0">
+                <a:solidFill>
+                  <a:srgbClr val="11202B"/>
+                </a:solidFill>
+                <a:latin typeface="Malgun Gothic"/>
+                <a:ea typeface="Malgun Gothic"/>
+                <a:cs typeface="Malgun Gothic"/>
+              </a:rPr>
+              <a:t> </a:t>
+            </a:r>
+            <a:r>
+              <a:rPr sz="1400" b="1" i="0">
+                <a:solidFill>
+                  <a:srgbClr val="11202B"/>
+                </a:solidFill>
+                <a:latin typeface="Malgun Gothic"/>
+                <a:ea typeface="Malgun Gothic"/>
+                <a:cs typeface="Malgun Gothic"/>
+              </a:rPr>
+              <a:t>Signal recognition particle(SRP)</a:t>
+            </a:r>
+            <a:r>
+              <a:rPr sz="1400" b="0" i="0">
+                <a:solidFill>
+                  <a:srgbClr val="11202B"/>
+                </a:solidFill>
+                <a:latin typeface="Malgun Gothic"/>
+                <a:ea typeface="Malgun Gothic"/>
+                <a:cs typeface="Malgun Gothic"/>
+              </a:rPr>
+              <a:t>은 RNA 한 분자와 여섯 개의 단백질로 된 복합체다. SRP가 신호서열에 결합하면 </a:t>
+            </a:r>
+            <a:r>
+              <a:rPr sz="1400" b="1" i="0">
+                <a:solidFill>
+                  <a:srgbClr val="11202B"/>
+                </a:solidFill>
+                <a:latin typeface="Malgun Gothic"/>
+                <a:ea typeface="Malgun Gothic"/>
+                <a:cs typeface="Malgun Gothic"/>
+              </a:rPr>
+              <a:t>번역이 일시적으로 느려진다.</a:t>
+            </a:r>
+            <a:r>
+              <a:rPr sz="1400" b="0" i="0">
+                <a:solidFill>
+                  <a:srgbClr val="11202B"/>
+                </a:solidFill>
+                <a:latin typeface="Malgun Gothic"/>
+                <a:ea typeface="Malgun Gothic"/>
+                <a:cs typeface="Malgun Gothic"/>
+              </a:rPr>
+              <a:t> 이 정지가 하는 일이 분명하다. 사슬이 세포질에서 다 만들어져 접혀 버리기 전에 막으로 갈 시간을 번다.</a:t>
             </a:r>
           </a:p>
         </p:txBody>
